--- a/.lessons/59 Vendor Product And Related Features/12 Product Variant - working with edit feature/1.pptx
+++ b/.lessons/59 Vendor Product And Related Features/12 Product Variant - working with edit feature/1.pptx
@@ -6,8 +6,14 @@
   </p:sldMasterIdLst>
   <p:sldIdLst>
     <p:sldId id="413" r:id="rId2"/>
-    <p:sldId id="414" r:id="rId3"/>
-    <p:sldId id="415" r:id="rId4"/>
+    <p:sldId id="416" r:id="rId3"/>
+    <p:sldId id="417" r:id="rId4"/>
+    <p:sldId id="414" r:id="rId5"/>
+    <p:sldId id="418" r:id="rId6"/>
+    <p:sldId id="419" r:id="rId7"/>
+    <p:sldId id="415" r:id="rId8"/>
+    <p:sldId id="420" r:id="rId9"/>
+    <p:sldId id="421" r:id="rId10"/>
   </p:sldIdLst>
   <p:sldSz cx="12192000" cy="6858000"/>
   <p:notesSz cx="6858000" cy="9144000"/>
@@ -261,7 +267,7 @@
           <a:p>
             <a:fld id="{3E102D2E-813C-461C-9963-687A650C48C0}" type="datetimeFigureOut">
               <a:rPr lang="en-US" smtClean="0"/>
-              <a:t>12/15/2025</a:t>
+              <a:t>12/23/2025</a:t>
             </a:fld>
             <a:endParaRPr lang="en-US"/>
           </a:p>
@@ -459,7 +465,7 @@
           <a:p>
             <a:fld id="{3E102D2E-813C-461C-9963-687A650C48C0}" type="datetimeFigureOut">
               <a:rPr lang="en-US" smtClean="0"/>
-              <a:t>12/15/2025</a:t>
+              <a:t>12/23/2025</a:t>
             </a:fld>
             <a:endParaRPr lang="en-US"/>
           </a:p>
@@ -667,7 +673,7 @@
           <a:p>
             <a:fld id="{3E102D2E-813C-461C-9963-687A650C48C0}" type="datetimeFigureOut">
               <a:rPr lang="en-US" smtClean="0"/>
-              <a:t>12/15/2025</a:t>
+              <a:t>12/23/2025</a:t>
             </a:fld>
             <a:endParaRPr lang="en-US"/>
           </a:p>
@@ -865,7 +871,7 @@
           <a:p>
             <a:fld id="{3E102D2E-813C-461C-9963-687A650C48C0}" type="datetimeFigureOut">
               <a:rPr lang="en-US" smtClean="0"/>
-              <a:t>12/15/2025</a:t>
+              <a:t>12/23/2025</a:t>
             </a:fld>
             <a:endParaRPr lang="en-US"/>
           </a:p>
@@ -1140,7 +1146,7 @@
           <a:p>
             <a:fld id="{3E102D2E-813C-461C-9963-687A650C48C0}" type="datetimeFigureOut">
               <a:rPr lang="en-US" smtClean="0"/>
-              <a:t>12/15/2025</a:t>
+              <a:t>12/23/2025</a:t>
             </a:fld>
             <a:endParaRPr lang="en-US"/>
           </a:p>
@@ -1405,7 +1411,7 @@
           <a:p>
             <a:fld id="{3E102D2E-813C-461C-9963-687A650C48C0}" type="datetimeFigureOut">
               <a:rPr lang="en-US" smtClean="0"/>
-              <a:t>12/15/2025</a:t>
+              <a:t>12/23/2025</a:t>
             </a:fld>
             <a:endParaRPr lang="en-US"/>
           </a:p>
@@ -1817,7 +1823,7 @@
           <a:p>
             <a:fld id="{3E102D2E-813C-461C-9963-687A650C48C0}" type="datetimeFigureOut">
               <a:rPr lang="en-US" smtClean="0"/>
-              <a:t>12/15/2025</a:t>
+              <a:t>12/23/2025</a:t>
             </a:fld>
             <a:endParaRPr lang="en-US"/>
           </a:p>
@@ -1958,7 +1964,7 @@
           <a:p>
             <a:fld id="{3E102D2E-813C-461C-9963-687A650C48C0}" type="datetimeFigureOut">
               <a:rPr lang="en-US" smtClean="0"/>
-              <a:t>12/15/2025</a:t>
+              <a:t>12/23/2025</a:t>
             </a:fld>
             <a:endParaRPr lang="en-US"/>
           </a:p>
@@ -2071,7 +2077,7 @@
           <a:p>
             <a:fld id="{3E102D2E-813C-461C-9963-687A650C48C0}" type="datetimeFigureOut">
               <a:rPr lang="en-US" smtClean="0"/>
-              <a:t>12/15/2025</a:t>
+              <a:t>12/23/2025</a:t>
             </a:fld>
             <a:endParaRPr lang="en-US"/>
           </a:p>
@@ -2382,7 +2388,7 @@
           <a:p>
             <a:fld id="{3E102D2E-813C-461C-9963-687A650C48C0}" type="datetimeFigureOut">
               <a:rPr lang="en-US" smtClean="0"/>
-              <a:t>12/15/2025</a:t>
+              <a:t>12/23/2025</a:t>
             </a:fld>
             <a:endParaRPr lang="en-US"/>
           </a:p>
@@ -2670,7 +2676,7 @@
           <a:p>
             <a:fld id="{3E102D2E-813C-461C-9963-687A650C48C0}" type="datetimeFigureOut">
               <a:rPr lang="en-US" smtClean="0"/>
-              <a:t>12/15/2025</a:t>
+              <a:t>12/23/2025</a:t>
             </a:fld>
             <a:endParaRPr lang="en-US"/>
           </a:p>
@@ -2911,7 +2917,7 @@
           <a:p>
             <a:fld id="{3E102D2E-813C-461C-9963-687A650C48C0}" type="datetimeFigureOut">
               <a:rPr lang="en-US" smtClean="0"/>
-              <a:t>12/15/2025</a:t>
+              <a:t>12/23/2025</a:t>
             </a:fld>
             <a:endParaRPr lang="en-US"/>
           </a:p>
@@ -3384,6 +3390,36 @@
           </a:p>
         </p:txBody>
       </p:sp>
+      <p:pic>
+        <p:nvPicPr>
+          <p:cNvPr id="4" name="Picture 3">
+            <a:extLst>
+              <a:ext uri="{FF2B5EF4-FFF2-40B4-BE49-F238E27FC236}">
+                <a16:creationId xmlns:a16="http://schemas.microsoft.com/office/drawing/2014/main" id="{695CCEC5-3A93-D701-04E8-F209C25EFBF9}"/>
+              </a:ext>
+            </a:extLst>
+          </p:cNvPr>
+          <p:cNvPicPr>
+            <a:picLocks noChangeAspect="1"/>
+          </p:cNvPicPr>
+          <p:nvPr/>
+        </p:nvPicPr>
+        <p:blipFill>
+          <a:blip r:embed="rId2"/>
+          <a:stretch>
+            <a:fillRect/>
+          </a:stretch>
+        </p:blipFill>
+        <p:spPr>
+          <a:xfrm>
+            <a:off x="47090" y="0"/>
+            <a:ext cx="12097820" cy="6858000"/>
+          </a:xfrm>
+          <a:prstGeom prst="rect">
+            <a:avLst/>
+          </a:prstGeom>
+        </p:spPr>
+      </p:pic>
     </p:spTree>
     <p:extLst>
       <p:ext uri="{BB962C8B-B14F-4D97-AF65-F5344CB8AC3E}">
@@ -3398,6 +3434,238 @@
 </file>
 
 <file path=ppt/slides/slide2.xml><?xml version="1.0" encoding="utf-8"?>
+<p:sld xmlns:a="http://schemas.openxmlformats.org/drawingml/2006/main" xmlns:r="http://schemas.openxmlformats.org/officeDocument/2006/relationships" xmlns:p="http://schemas.openxmlformats.org/presentationml/2006/main">
+  <p:cSld>
+    <p:spTree>
+      <p:nvGrpSpPr>
+        <p:cNvPr id="1" name="">
+          <a:extLst>
+            <a:ext uri="{FF2B5EF4-FFF2-40B4-BE49-F238E27FC236}">
+              <a16:creationId xmlns:a16="http://schemas.microsoft.com/office/drawing/2014/main" id="{C9267A23-007E-CA57-93E1-275A4FDA17F4}"/>
+            </a:ext>
+          </a:extLst>
+        </p:cNvPr>
+        <p:cNvGrpSpPr/>
+        <p:nvPr/>
+      </p:nvGrpSpPr>
+      <p:grpSpPr>
+        <a:xfrm>
+          <a:off x="0" y="0"/>
+          <a:ext cx="0" cy="0"/>
+          <a:chOff x="0" y="0"/>
+          <a:chExt cx="0" cy="0"/>
+        </a:xfrm>
+      </p:grpSpPr>
+      <p:sp>
+        <p:nvSpPr>
+          <p:cNvPr id="3" name="TextBox 2">
+            <a:extLst>
+              <a:ext uri="{FF2B5EF4-FFF2-40B4-BE49-F238E27FC236}">
+                <a16:creationId xmlns:a16="http://schemas.microsoft.com/office/drawing/2014/main" id="{FF2D4BBB-70BA-8BFC-A406-63A13BC30481}"/>
+              </a:ext>
+            </a:extLst>
+          </p:cNvPr>
+          <p:cNvSpPr txBox="1"/>
+          <p:nvPr/>
+        </p:nvSpPr>
+        <p:spPr>
+          <a:xfrm>
+            <a:off x="0" y="0"/>
+            <a:ext cx="12192000" cy="355354"/>
+          </a:xfrm>
+          <a:prstGeom prst="rect">
+            <a:avLst/>
+          </a:prstGeom>
+          <a:noFill/>
+        </p:spPr>
+        <p:txBody>
+          <a:bodyPr wrap="square">
+            <a:spAutoFit/>
+          </a:bodyPr>
+          <a:lstStyle/>
+          <a:p>
+            <a:pPr>
+              <a:lnSpc>
+                <a:spcPct val="150000"/>
+              </a:lnSpc>
+              <a:buNone/>
+            </a:pPr>
+            <a:r>
+              <a:rPr kumimoji="0" lang="en-US" altLang="en-US" sz="1300" b="0" i="0" u="none" strike="noStrike" cap="none" normalizeH="0" baseline="0">
+                <a:ln>
+                  <a:noFill/>
+                </a:ln>
+                <a:solidFill>
+                  <a:schemeClr val="tx1"/>
+                </a:solidFill>
+                <a:effectLst/>
+                <a:latin typeface="Arial" panose="020B0604020202020204" pitchFamily="34" charset="0"/>
+              </a:rPr>
+              <a:t>.</a:t>
+            </a:r>
+          </a:p>
+        </p:txBody>
+      </p:sp>
+      <p:pic>
+        <p:nvPicPr>
+          <p:cNvPr id="4" name="Picture 3">
+            <a:extLst>
+              <a:ext uri="{FF2B5EF4-FFF2-40B4-BE49-F238E27FC236}">
+                <a16:creationId xmlns:a16="http://schemas.microsoft.com/office/drawing/2014/main" id="{D8839B1D-2C5D-9DA5-673B-B58A4DF9D7E0}"/>
+              </a:ext>
+            </a:extLst>
+          </p:cNvPr>
+          <p:cNvPicPr>
+            <a:picLocks noChangeAspect="1"/>
+          </p:cNvPicPr>
+          <p:nvPr/>
+        </p:nvPicPr>
+        <p:blipFill>
+          <a:blip r:embed="rId2"/>
+          <a:stretch>
+            <a:fillRect/>
+          </a:stretch>
+        </p:blipFill>
+        <p:spPr>
+          <a:xfrm>
+            <a:off x="2014859" y="0"/>
+            <a:ext cx="8162282" cy="6858000"/>
+          </a:xfrm>
+          <a:prstGeom prst="rect">
+            <a:avLst/>
+          </a:prstGeom>
+        </p:spPr>
+      </p:pic>
+    </p:spTree>
+    <p:extLst>
+      <p:ext uri="{BB962C8B-B14F-4D97-AF65-F5344CB8AC3E}">
+        <p14:creationId xmlns:p14="http://schemas.microsoft.com/office/powerpoint/2010/main" val="4104787981"/>
+      </p:ext>
+    </p:extLst>
+  </p:cSld>
+  <p:clrMapOvr>
+    <a:masterClrMapping/>
+  </p:clrMapOvr>
+</p:sld>
+</file>
+
+<file path=ppt/slides/slide3.xml><?xml version="1.0" encoding="utf-8"?>
+<p:sld xmlns:a="http://schemas.openxmlformats.org/drawingml/2006/main" xmlns:r="http://schemas.openxmlformats.org/officeDocument/2006/relationships" xmlns:p="http://schemas.openxmlformats.org/presentationml/2006/main">
+  <p:cSld>
+    <p:spTree>
+      <p:nvGrpSpPr>
+        <p:cNvPr id="1" name="">
+          <a:extLst>
+            <a:ext uri="{FF2B5EF4-FFF2-40B4-BE49-F238E27FC236}">
+              <a16:creationId xmlns:a16="http://schemas.microsoft.com/office/drawing/2014/main" id="{7AD7438B-98C3-3F73-0328-D2DE7D314E8A}"/>
+            </a:ext>
+          </a:extLst>
+        </p:cNvPr>
+        <p:cNvGrpSpPr/>
+        <p:nvPr/>
+      </p:nvGrpSpPr>
+      <p:grpSpPr>
+        <a:xfrm>
+          <a:off x="0" y="0"/>
+          <a:ext cx="0" cy="0"/>
+          <a:chOff x="0" y="0"/>
+          <a:chExt cx="0" cy="0"/>
+        </a:xfrm>
+      </p:grpSpPr>
+      <p:sp>
+        <p:nvSpPr>
+          <p:cNvPr id="3" name="TextBox 2">
+            <a:extLst>
+              <a:ext uri="{FF2B5EF4-FFF2-40B4-BE49-F238E27FC236}">
+                <a16:creationId xmlns:a16="http://schemas.microsoft.com/office/drawing/2014/main" id="{19E31B69-DA66-BF30-4052-966B12700071}"/>
+              </a:ext>
+            </a:extLst>
+          </p:cNvPr>
+          <p:cNvSpPr txBox="1"/>
+          <p:nvPr/>
+        </p:nvSpPr>
+        <p:spPr>
+          <a:xfrm>
+            <a:off x="0" y="0"/>
+            <a:ext cx="12192000" cy="355354"/>
+          </a:xfrm>
+          <a:prstGeom prst="rect">
+            <a:avLst/>
+          </a:prstGeom>
+          <a:noFill/>
+        </p:spPr>
+        <p:txBody>
+          <a:bodyPr wrap="square">
+            <a:spAutoFit/>
+          </a:bodyPr>
+          <a:lstStyle/>
+          <a:p>
+            <a:pPr>
+              <a:lnSpc>
+                <a:spcPct val="150000"/>
+              </a:lnSpc>
+              <a:buNone/>
+            </a:pPr>
+            <a:r>
+              <a:rPr kumimoji="0" lang="en-US" altLang="en-US" sz="1300" b="0" i="0" u="none" strike="noStrike" cap="none" normalizeH="0" baseline="0">
+                <a:ln>
+                  <a:noFill/>
+                </a:ln>
+                <a:solidFill>
+                  <a:schemeClr val="tx1"/>
+                </a:solidFill>
+                <a:effectLst/>
+                <a:latin typeface="Arial" panose="020B0604020202020204" pitchFamily="34" charset="0"/>
+              </a:rPr>
+              <a:t>.</a:t>
+            </a:r>
+          </a:p>
+        </p:txBody>
+      </p:sp>
+      <p:pic>
+        <p:nvPicPr>
+          <p:cNvPr id="4" name="Picture 3">
+            <a:extLst>
+              <a:ext uri="{FF2B5EF4-FFF2-40B4-BE49-F238E27FC236}">
+                <a16:creationId xmlns:a16="http://schemas.microsoft.com/office/drawing/2014/main" id="{606CE86F-24DB-9E38-4F9E-299BD30C8BFA}"/>
+              </a:ext>
+            </a:extLst>
+          </p:cNvPr>
+          <p:cNvPicPr>
+            <a:picLocks noChangeAspect="1"/>
+          </p:cNvPicPr>
+          <p:nvPr/>
+        </p:nvPicPr>
+        <p:blipFill>
+          <a:blip r:embed="rId2"/>
+          <a:stretch>
+            <a:fillRect/>
+          </a:stretch>
+        </p:blipFill>
+        <p:spPr>
+          <a:xfrm>
+            <a:off x="1609491" y="0"/>
+            <a:ext cx="8973018" cy="6858000"/>
+          </a:xfrm>
+          <a:prstGeom prst="rect">
+            <a:avLst/>
+          </a:prstGeom>
+        </p:spPr>
+      </p:pic>
+    </p:spTree>
+    <p:extLst>
+      <p:ext uri="{BB962C8B-B14F-4D97-AF65-F5344CB8AC3E}">
+        <p14:creationId xmlns:p14="http://schemas.microsoft.com/office/powerpoint/2010/main" val="980400716"/>
+      </p:ext>
+    </p:extLst>
+  </p:cSld>
+  <p:clrMapOvr>
+    <a:masterClrMapping/>
+  </p:clrMapOvr>
+</p:sld>
+</file>
+
+<file path=ppt/slides/slide4.xml><?xml version="1.0" encoding="utf-8"?>
 <p:sld xmlns:a="http://schemas.openxmlformats.org/drawingml/2006/main" xmlns:r="http://schemas.openxmlformats.org/officeDocument/2006/relationships" xmlns:p="http://schemas.openxmlformats.org/presentationml/2006/main">
   <p:cSld>
     <p:spTree>
@@ -3470,6 +3738,36 @@
           </a:p>
         </p:txBody>
       </p:sp>
+      <p:pic>
+        <p:nvPicPr>
+          <p:cNvPr id="4" name="Picture 3">
+            <a:extLst>
+              <a:ext uri="{FF2B5EF4-FFF2-40B4-BE49-F238E27FC236}">
+                <a16:creationId xmlns:a16="http://schemas.microsoft.com/office/drawing/2014/main" id="{C7FF6223-BB2D-5435-CB31-C25C25B65787}"/>
+              </a:ext>
+            </a:extLst>
+          </p:cNvPr>
+          <p:cNvPicPr>
+            <a:picLocks noChangeAspect="1"/>
+          </p:cNvPicPr>
+          <p:nvPr/>
+        </p:nvPicPr>
+        <p:blipFill>
+          <a:blip r:embed="rId2"/>
+          <a:stretch>
+            <a:fillRect/>
+          </a:stretch>
+        </p:blipFill>
+        <p:spPr>
+          <a:xfrm>
+            <a:off x="0" y="1228820"/>
+            <a:ext cx="12192000" cy="4400360"/>
+          </a:xfrm>
+          <a:prstGeom prst="rect">
+            <a:avLst/>
+          </a:prstGeom>
+        </p:spPr>
+      </p:pic>
     </p:spTree>
     <p:extLst>
       <p:ext uri="{BB962C8B-B14F-4D97-AF65-F5344CB8AC3E}">
@@ -3483,7 +3781,239 @@
 </p:sld>
 </file>
 
-<file path=ppt/slides/slide3.xml><?xml version="1.0" encoding="utf-8"?>
+<file path=ppt/slides/slide5.xml><?xml version="1.0" encoding="utf-8"?>
+<p:sld xmlns:a="http://schemas.openxmlformats.org/drawingml/2006/main" xmlns:r="http://schemas.openxmlformats.org/officeDocument/2006/relationships" xmlns:p="http://schemas.openxmlformats.org/presentationml/2006/main">
+  <p:cSld>
+    <p:spTree>
+      <p:nvGrpSpPr>
+        <p:cNvPr id="1" name="">
+          <a:extLst>
+            <a:ext uri="{FF2B5EF4-FFF2-40B4-BE49-F238E27FC236}">
+              <a16:creationId xmlns:a16="http://schemas.microsoft.com/office/drawing/2014/main" id="{89F9864B-E627-92D8-0A30-72BC52770D4B}"/>
+            </a:ext>
+          </a:extLst>
+        </p:cNvPr>
+        <p:cNvGrpSpPr/>
+        <p:nvPr/>
+      </p:nvGrpSpPr>
+      <p:grpSpPr>
+        <a:xfrm>
+          <a:off x="0" y="0"/>
+          <a:ext cx="0" cy="0"/>
+          <a:chOff x="0" y="0"/>
+          <a:chExt cx="0" cy="0"/>
+        </a:xfrm>
+      </p:grpSpPr>
+      <p:sp>
+        <p:nvSpPr>
+          <p:cNvPr id="3" name="TextBox 2">
+            <a:extLst>
+              <a:ext uri="{FF2B5EF4-FFF2-40B4-BE49-F238E27FC236}">
+                <a16:creationId xmlns:a16="http://schemas.microsoft.com/office/drawing/2014/main" id="{9F5B256B-06F2-C105-42C1-4A8DE9D44D14}"/>
+              </a:ext>
+            </a:extLst>
+          </p:cNvPr>
+          <p:cNvSpPr txBox="1"/>
+          <p:nvPr/>
+        </p:nvSpPr>
+        <p:spPr>
+          <a:xfrm>
+            <a:off x="0" y="0"/>
+            <a:ext cx="12192000" cy="355354"/>
+          </a:xfrm>
+          <a:prstGeom prst="rect">
+            <a:avLst/>
+          </a:prstGeom>
+          <a:noFill/>
+        </p:spPr>
+        <p:txBody>
+          <a:bodyPr wrap="square">
+            <a:spAutoFit/>
+          </a:bodyPr>
+          <a:lstStyle/>
+          <a:p>
+            <a:pPr>
+              <a:lnSpc>
+                <a:spcPct val="150000"/>
+              </a:lnSpc>
+              <a:buNone/>
+            </a:pPr>
+            <a:r>
+              <a:rPr kumimoji="0" lang="en-US" altLang="en-US" sz="1300" b="0" i="0" u="none" strike="noStrike" cap="none" normalizeH="0" baseline="0">
+                <a:ln>
+                  <a:noFill/>
+                </a:ln>
+                <a:solidFill>
+                  <a:schemeClr val="tx1"/>
+                </a:solidFill>
+                <a:effectLst/>
+                <a:latin typeface="Arial" panose="020B0604020202020204" pitchFamily="34" charset="0"/>
+              </a:rPr>
+              <a:t>.</a:t>
+            </a:r>
+          </a:p>
+        </p:txBody>
+      </p:sp>
+      <p:pic>
+        <p:nvPicPr>
+          <p:cNvPr id="4" name="Picture 3">
+            <a:extLst>
+              <a:ext uri="{FF2B5EF4-FFF2-40B4-BE49-F238E27FC236}">
+                <a16:creationId xmlns:a16="http://schemas.microsoft.com/office/drawing/2014/main" id="{0D51F251-2C85-5CB4-C845-6B71276F7DA2}"/>
+              </a:ext>
+            </a:extLst>
+          </p:cNvPr>
+          <p:cNvPicPr>
+            <a:picLocks noChangeAspect="1"/>
+          </p:cNvPicPr>
+          <p:nvPr/>
+        </p:nvPicPr>
+        <p:blipFill>
+          <a:blip r:embed="rId2"/>
+          <a:stretch>
+            <a:fillRect/>
+          </a:stretch>
+        </p:blipFill>
+        <p:spPr>
+          <a:xfrm>
+            <a:off x="0" y="1614184"/>
+            <a:ext cx="12192000" cy="3629631"/>
+          </a:xfrm>
+          <a:prstGeom prst="rect">
+            <a:avLst/>
+          </a:prstGeom>
+        </p:spPr>
+      </p:pic>
+    </p:spTree>
+    <p:extLst>
+      <p:ext uri="{BB962C8B-B14F-4D97-AF65-F5344CB8AC3E}">
+        <p14:creationId xmlns:p14="http://schemas.microsoft.com/office/powerpoint/2010/main" val="569538833"/>
+      </p:ext>
+    </p:extLst>
+  </p:cSld>
+  <p:clrMapOvr>
+    <a:masterClrMapping/>
+  </p:clrMapOvr>
+</p:sld>
+</file>
+
+<file path=ppt/slides/slide6.xml><?xml version="1.0" encoding="utf-8"?>
+<p:sld xmlns:a="http://schemas.openxmlformats.org/drawingml/2006/main" xmlns:r="http://schemas.openxmlformats.org/officeDocument/2006/relationships" xmlns:p="http://schemas.openxmlformats.org/presentationml/2006/main">
+  <p:cSld>
+    <p:spTree>
+      <p:nvGrpSpPr>
+        <p:cNvPr id="1" name="">
+          <a:extLst>
+            <a:ext uri="{FF2B5EF4-FFF2-40B4-BE49-F238E27FC236}">
+              <a16:creationId xmlns:a16="http://schemas.microsoft.com/office/drawing/2014/main" id="{4BDC085E-7D1D-14D6-A852-D1CAFE4A7528}"/>
+            </a:ext>
+          </a:extLst>
+        </p:cNvPr>
+        <p:cNvGrpSpPr/>
+        <p:nvPr/>
+      </p:nvGrpSpPr>
+      <p:grpSpPr>
+        <a:xfrm>
+          <a:off x="0" y="0"/>
+          <a:ext cx="0" cy="0"/>
+          <a:chOff x="0" y="0"/>
+          <a:chExt cx="0" cy="0"/>
+        </a:xfrm>
+      </p:grpSpPr>
+      <p:sp>
+        <p:nvSpPr>
+          <p:cNvPr id="3" name="TextBox 2">
+            <a:extLst>
+              <a:ext uri="{FF2B5EF4-FFF2-40B4-BE49-F238E27FC236}">
+                <a16:creationId xmlns:a16="http://schemas.microsoft.com/office/drawing/2014/main" id="{5C4FF61D-CA97-2FA2-4D7C-5E96DEC81D90}"/>
+              </a:ext>
+            </a:extLst>
+          </p:cNvPr>
+          <p:cNvSpPr txBox="1"/>
+          <p:nvPr/>
+        </p:nvSpPr>
+        <p:spPr>
+          <a:xfrm>
+            <a:off x="0" y="0"/>
+            <a:ext cx="12192000" cy="355354"/>
+          </a:xfrm>
+          <a:prstGeom prst="rect">
+            <a:avLst/>
+          </a:prstGeom>
+          <a:noFill/>
+        </p:spPr>
+        <p:txBody>
+          <a:bodyPr wrap="square">
+            <a:spAutoFit/>
+          </a:bodyPr>
+          <a:lstStyle/>
+          <a:p>
+            <a:pPr>
+              <a:lnSpc>
+                <a:spcPct val="150000"/>
+              </a:lnSpc>
+              <a:buNone/>
+            </a:pPr>
+            <a:r>
+              <a:rPr kumimoji="0" lang="en-US" altLang="en-US" sz="1300" b="0" i="0" u="none" strike="noStrike" cap="none" normalizeH="0" baseline="0">
+                <a:ln>
+                  <a:noFill/>
+                </a:ln>
+                <a:solidFill>
+                  <a:schemeClr val="tx1"/>
+                </a:solidFill>
+                <a:effectLst/>
+                <a:latin typeface="Arial" panose="020B0604020202020204" pitchFamily="34" charset="0"/>
+              </a:rPr>
+              <a:t>.</a:t>
+            </a:r>
+          </a:p>
+        </p:txBody>
+      </p:sp>
+      <p:pic>
+        <p:nvPicPr>
+          <p:cNvPr id="4" name="Picture 3">
+            <a:extLst>
+              <a:ext uri="{FF2B5EF4-FFF2-40B4-BE49-F238E27FC236}">
+                <a16:creationId xmlns:a16="http://schemas.microsoft.com/office/drawing/2014/main" id="{CADFD642-D485-FEE5-BA76-06D736EC4426}"/>
+              </a:ext>
+            </a:extLst>
+          </p:cNvPr>
+          <p:cNvPicPr>
+            <a:picLocks noChangeAspect="1"/>
+          </p:cNvPicPr>
+          <p:nvPr/>
+        </p:nvPicPr>
+        <p:blipFill>
+          <a:blip r:embed="rId2"/>
+          <a:stretch>
+            <a:fillRect/>
+          </a:stretch>
+        </p:blipFill>
+        <p:spPr>
+          <a:xfrm>
+            <a:off x="0" y="1242080"/>
+            <a:ext cx="12192000" cy="4373840"/>
+          </a:xfrm>
+          <a:prstGeom prst="rect">
+            <a:avLst/>
+          </a:prstGeom>
+        </p:spPr>
+      </p:pic>
+    </p:spTree>
+    <p:extLst>
+      <p:ext uri="{BB962C8B-B14F-4D97-AF65-F5344CB8AC3E}">
+        <p14:creationId xmlns:p14="http://schemas.microsoft.com/office/powerpoint/2010/main" val="762543033"/>
+      </p:ext>
+    </p:extLst>
+  </p:cSld>
+  <p:clrMapOvr>
+    <a:masterClrMapping/>
+  </p:clrMapOvr>
+</p:sld>
+</file>
+
+<file path=ppt/slides/slide7.xml><?xml version="1.0" encoding="utf-8"?>
 <p:sld xmlns:a="http://schemas.openxmlformats.org/drawingml/2006/main" xmlns:r="http://schemas.openxmlformats.org/officeDocument/2006/relationships" xmlns:p="http://schemas.openxmlformats.org/presentationml/2006/main">
   <p:cSld>
     <p:spTree>
@@ -3560,6 +4090,178 @@
     <p:extLst>
       <p:ext uri="{BB962C8B-B14F-4D97-AF65-F5344CB8AC3E}">
         <p14:creationId xmlns:p14="http://schemas.microsoft.com/office/powerpoint/2010/main" val="3737127349"/>
+      </p:ext>
+    </p:extLst>
+  </p:cSld>
+  <p:clrMapOvr>
+    <a:masterClrMapping/>
+  </p:clrMapOvr>
+</p:sld>
+</file>
+
+<file path=ppt/slides/slide8.xml><?xml version="1.0" encoding="utf-8"?>
+<p:sld xmlns:a="http://schemas.openxmlformats.org/drawingml/2006/main" xmlns:r="http://schemas.openxmlformats.org/officeDocument/2006/relationships" xmlns:p="http://schemas.openxmlformats.org/presentationml/2006/main">
+  <p:cSld>
+    <p:spTree>
+      <p:nvGrpSpPr>
+        <p:cNvPr id="1" name="">
+          <a:extLst>
+            <a:ext uri="{FF2B5EF4-FFF2-40B4-BE49-F238E27FC236}">
+              <a16:creationId xmlns:a16="http://schemas.microsoft.com/office/drawing/2014/main" id="{0A35F2DB-DE6A-3C81-5DB6-AB3385F8296D}"/>
+            </a:ext>
+          </a:extLst>
+        </p:cNvPr>
+        <p:cNvGrpSpPr/>
+        <p:nvPr/>
+      </p:nvGrpSpPr>
+      <p:grpSpPr>
+        <a:xfrm>
+          <a:off x="0" y="0"/>
+          <a:ext cx="0" cy="0"/>
+          <a:chOff x="0" y="0"/>
+          <a:chExt cx="0" cy="0"/>
+        </a:xfrm>
+      </p:grpSpPr>
+      <p:sp>
+        <p:nvSpPr>
+          <p:cNvPr id="3" name="TextBox 2">
+            <a:extLst>
+              <a:ext uri="{FF2B5EF4-FFF2-40B4-BE49-F238E27FC236}">
+                <a16:creationId xmlns:a16="http://schemas.microsoft.com/office/drawing/2014/main" id="{B4E5F5B4-0ECF-BD53-91C8-36A29ABA3D53}"/>
+              </a:ext>
+            </a:extLst>
+          </p:cNvPr>
+          <p:cNvSpPr txBox="1"/>
+          <p:nvPr/>
+        </p:nvSpPr>
+        <p:spPr>
+          <a:xfrm>
+            <a:off x="0" y="0"/>
+            <a:ext cx="12192000" cy="355354"/>
+          </a:xfrm>
+          <a:prstGeom prst="rect">
+            <a:avLst/>
+          </a:prstGeom>
+          <a:noFill/>
+        </p:spPr>
+        <p:txBody>
+          <a:bodyPr wrap="square">
+            <a:spAutoFit/>
+          </a:bodyPr>
+          <a:lstStyle/>
+          <a:p>
+            <a:pPr>
+              <a:lnSpc>
+                <a:spcPct val="150000"/>
+              </a:lnSpc>
+              <a:buNone/>
+            </a:pPr>
+            <a:r>
+              <a:rPr kumimoji="0" lang="en-US" altLang="en-US" sz="1300" b="0" i="0" u="none" strike="noStrike" cap="none" normalizeH="0" baseline="0">
+                <a:ln>
+                  <a:noFill/>
+                </a:ln>
+                <a:solidFill>
+                  <a:schemeClr val="tx1"/>
+                </a:solidFill>
+                <a:effectLst/>
+                <a:latin typeface="Arial" panose="020B0604020202020204" pitchFamily="34" charset="0"/>
+              </a:rPr>
+              <a:t>.</a:t>
+            </a:r>
+          </a:p>
+        </p:txBody>
+      </p:sp>
+    </p:spTree>
+    <p:extLst>
+      <p:ext uri="{BB962C8B-B14F-4D97-AF65-F5344CB8AC3E}">
+        <p14:creationId xmlns:p14="http://schemas.microsoft.com/office/powerpoint/2010/main" val="89872738"/>
+      </p:ext>
+    </p:extLst>
+  </p:cSld>
+  <p:clrMapOvr>
+    <a:masterClrMapping/>
+  </p:clrMapOvr>
+</p:sld>
+</file>
+
+<file path=ppt/slides/slide9.xml><?xml version="1.0" encoding="utf-8"?>
+<p:sld xmlns:a="http://schemas.openxmlformats.org/drawingml/2006/main" xmlns:r="http://schemas.openxmlformats.org/officeDocument/2006/relationships" xmlns:p="http://schemas.openxmlformats.org/presentationml/2006/main">
+  <p:cSld>
+    <p:spTree>
+      <p:nvGrpSpPr>
+        <p:cNvPr id="1" name="">
+          <a:extLst>
+            <a:ext uri="{FF2B5EF4-FFF2-40B4-BE49-F238E27FC236}">
+              <a16:creationId xmlns:a16="http://schemas.microsoft.com/office/drawing/2014/main" id="{CEE36A1C-48EE-66F2-CAE4-CBEC23788756}"/>
+            </a:ext>
+          </a:extLst>
+        </p:cNvPr>
+        <p:cNvGrpSpPr/>
+        <p:nvPr/>
+      </p:nvGrpSpPr>
+      <p:grpSpPr>
+        <a:xfrm>
+          <a:off x="0" y="0"/>
+          <a:ext cx="0" cy="0"/>
+          <a:chOff x="0" y="0"/>
+          <a:chExt cx="0" cy="0"/>
+        </a:xfrm>
+      </p:grpSpPr>
+      <p:sp>
+        <p:nvSpPr>
+          <p:cNvPr id="3" name="TextBox 2">
+            <a:extLst>
+              <a:ext uri="{FF2B5EF4-FFF2-40B4-BE49-F238E27FC236}">
+                <a16:creationId xmlns:a16="http://schemas.microsoft.com/office/drawing/2014/main" id="{B8E3438F-AC28-3482-B5E0-CF8538946C34}"/>
+              </a:ext>
+            </a:extLst>
+          </p:cNvPr>
+          <p:cNvSpPr txBox="1"/>
+          <p:nvPr/>
+        </p:nvSpPr>
+        <p:spPr>
+          <a:xfrm>
+            <a:off x="0" y="0"/>
+            <a:ext cx="12192000" cy="355354"/>
+          </a:xfrm>
+          <a:prstGeom prst="rect">
+            <a:avLst/>
+          </a:prstGeom>
+          <a:noFill/>
+        </p:spPr>
+        <p:txBody>
+          <a:bodyPr wrap="square">
+            <a:spAutoFit/>
+          </a:bodyPr>
+          <a:lstStyle/>
+          <a:p>
+            <a:pPr>
+              <a:lnSpc>
+                <a:spcPct val="150000"/>
+              </a:lnSpc>
+              <a:buNone/>
+            </a:pPr>
+            <a:r>
+              <a:rPr kumimoji="0" lang="en-US" altLang="en-US" sz="1300" b="0" i="0" u="none" strike="noStrike" cap="none" normalizeH="0" baseline="0">
+                <a:ln>
+                  <a:noFill/>
+                </a:ln>
+                <a:solidFill>
+                  <a:schemeClr val="tx1"/>
+                </a:solidFill>
+                <a:effectLst/>
+                <a:latin typeface="Arial" panose="020B0604020202020204" pitchFamily="34" charset="0"/>
+              </a:rPr>
+              <a:t>.</a:t>
+            </a:r>
+          </a:p>
+        </p:txBody>
+      </p:sp>
+    </p:spTree>
+    <p:extLst>
+      <p:ext uri="{BB962C8B-B14F-4D97-AF65-F5344CB8AC3E}">
+        <p14:creationId xmlns:p14="http://schemas.microsoft.com/office/powerpoint/2010/main" val="812075303"/>
       </p:ext>
     </p:extLst>
   </p:cSld>
